--- a/docs/media/ShotProof-pitch-AMD-final.pptx
+++ b/docs/media/ShotProof-pitch-AMD-final.pptx
@@ -726,7 +726,7 @@
           <a:lstStyle xmlns:a="http://schemas.openxmlformats.org/drawingml/2006/main"/>
           <a:p xmlns:a="http://schemas.openxmlformats.org/drawingml/2006/main">
             <a:r>
-              <a:t>Current execution evidence: output/shotproof-three-live-amd-evidence.json. Addition 1398 ms, occlusion 1282 ms, lighting 1566 ms, measured around synchronized GPU generation; not end-to-end benchmark latency. First warm-up took 13902 ms. Earlier nonconforming outputs are retained. The UI export contains exact PNG bytes, hashes, raw model text and agent_demo annotations. No owner approval is inferred. Engineering evidence: tests/test_core.cjs (70 checks), tests/test_ui.cjs (40 checks), tests/test_inference.py (9 tests), output/playwright/browser-results.json (1440x1000, 768x1024 and 390x844). Engineering checks do not measure model quality. AMD Token Factory signed-in page after successful team creation: email still not registered for API distribution. Discord connected, community joined and Closed solo ShotProof team created. The separate official One-Click OCR Notebook already provides a working private GPU path, so demonstration no longer depends on Token Factory. The real-time URL requires the owner AMD login. Public judge access remains unresolved. Official event https://lablab.ai/ai-hackathons/amd-developer-hackathon-act-iii, observed 2026-10-17, states submission deadline October 18 06:00 EDT. No final submission, public deployment or licensing change has occurred.</a:t>
+              <a:t>Current execution evidence: output/shotproof-three-live-amd-evidence.json. Addition 1398 ms, occlusion 1282 ms, lighting 1566 ms, measured around synchronized GPU generation; not end-to-end benchmark latency. First warm-up took 13902 ms. Earlier nonconforming outputs are retained. The UI export contains exact PNG bytes, hashes, raw model text and agent_demo annotations. No owner approval is inferred. Engineering evidence: tests/test_core.cjs (70 checks), tests/test_ui.cjs (40 checks), tests/test_inference.py (9 tests), output/playwright/browser-results.json (1440x1000, 768x1024 and 390x844). Engineering checks do not measure model quality. AMD Token Factory signed-in page after successful team creation: email still not registered for API distribution. Discord connected, community joined and Closed solo ShotProof team created. The separate official One-Click OCR Notebook already provides a working private GPU path, so demonstration no longer depends on Token Factory. The real-time URL requires the owner AMD login. Public judge access is available through the recorded evidence viewer; the private GPU session was stopped after export. Official event https://lablab.ai/ai-hackathons/amd-developer-hackathon-act-iii, observed 2026-10-17, states submission deadline October 18 06:00 EDT. No final submission has occurred. Project-owned code and original SVG illustrations are released under MIT; model weights are not bundled or relicensed.</a:t>
             </a:r>
           </a:p>
         </p:txBody>
